--- a/Semana4/Selección natural.pptx
+++ b/Semana4/Selección natural.pptx
@@ -5563,8 +5563,8 @@
           </a:p>
         </p:txBody>
       </p:sp>
-      <mc:AlternateContent xmlns:mc="http://schemas.openxmlformats.org/markup-compatibility/2006">
-        <mc:Choice xmlns:a14="http://schemas.microsoft.com/office/drawing/2010/main" Requires="a14">
+      <mc:AlternateContent xmlns:mc="http://schemas.openxmlformats.org/markup-compatibility/2006" xmlns:a14="http://schemas.microsoft.com/office/drawing/2010/main">
+        <mc:Choice Requires="a14">
           <p:sp>
             <p:nvSpPr>
               <p:cNvPr id="3" name="Marcador de contenido 2">
@@ -5694,7 +5694,7 @@
             </p:txBody>
           </p:sp>
         </mc:Choice>
-        <mc:Fallback>
+        <mc:Fallback xmlns="">
           <p:sp>
             <p:nvSpPr>
               <p:cNvPr id="3" name="Marcador de contenido 2">
@@ -6051,8 +6051,8 @@
           <a:chExt cx="0" cy="0"/>
         </a:xfrm>
       </p:grpSpPr>
-      <mc:AlternateContent xmlns:mc="http://schemas.openxmlformats.org/markup-compatibility/2006">
-        <mc:Choice xmlns:a14="http://schemas.microsoft.com/office/drawing/2010/main" Requires="a14">
+      <mc:AlternateContent xmlns:mc="http://schemas.openxmlformats.org/markup-compatibility/2006" xmlns:a14="http://schemas.microsoft.com/office/drawing/2010/main">
+        <mc:Choice Requires="a14">
           <p:sp>
             <p:nvSpPr>
               <p:cNvPr id="2" name="Título 1">
@@ -6111,7 +6111,7 @@
             </p:txBody>
           </p:sp>
         </mc:Choice>
-        <mc:Fallback>
+        <mc:Fallback xmlns="">
           <p:sp>
             <p:nvSpPr>
               <p:cNvPr id="2" name="Título 1">
@@ -6209,7 +6209,15 @@
                 </a:pPr>
                 <a:r>
                   <a:rPr lang="es-CO" dirty="0"/>
-                  <a:t>w11 = 3/4, w12=4/4, w13=3/4</a:t>
+                  <a:t>w11 </a:t>
+                </a:r>
+                <a:r>
+                  <a:rPr lang="es-CO"/>
+                  <a:t>= 4/4</a:t>
+                </a:r>
+                <a:r>
+                  <a:rPr lang="es-CO" dirty="0"/>
+                  <a:t>, w12=4/4, w13=3/4</a:t>
                 </a:r>
                 <a:endParaRPr lang="es-ES" dirty="0"/>
               </a:p>
@@ -7919,8 +7927,8 @@
           </a:p>
         </p:txBody>
       </p:sp>
-      <mc:AlternateContent xmlns:mc="http://schemas.openxmlformats.org/markup-compatibility/2006">
-        <mc:Choice xmlns:a14="http://schemas.microsoft.com/office/drawing/2010/main" Requires="a14">
+      <mc:AlternateContent xmlns:mc="http://schemas.openxmlformats.org/markup-compatibility/2006" xmlns:a14="http://schemas.microsoft.com/office/drawing/2010/main">
+        <mc:Choice Requires="a14">
           <p:sp>
             <p:nvSpPr>
               <p:cNvPr id="3" name="Marcador de contenido 2">
@@ -8119,7 +8127,7 @@
             </p:txBody>
           </p:sp>
         </mc:Choice>
-        <mc:Fallback>
+        <mc:Fallback xmlns="">
           <p:sp>
             <p:nvSpPr>
               <p:cNvPr id="3" name="Marcador de contenido 2">
@@ -8366,8 +8374,8 @@
           </a:p>
         </p:txBody>
       </p:sp>
-      <mc:AlternateContent xmlns:mc="http://schemas.openxmlformats.org/markup-compatibility/2006">
-        <mc:Choice xmlns:a14="http://schemas.microsoft.com/office/drawing/2010/main" Requires="a14">
+      <mc:AlternateContent xmlns:mc="http://schemas.openxmlformats.org/markup-compatibility/2006" xmlns:a14="http://schemas.microsoft.com/office/drawing/2010/main">
+        <mc:Choice Requires="a14">
           <p:sp>
             <p:nvSpPr>
               <p:cNvPr id="3" name="Marcador de contenido 2">
@@ -8559,7 +8567,7 @@
             </p:txBody>
           </p:sp>
         </mc:Choice>
-        <mc:Fallback>
+        <mc:Fallback xmlns="">
           <p:sp>
             <p:nvSpPr>
               <p:cNvPr id="3" name="Marcador de contenido 2">
